--- a/document/SLIDE_TONG_THE_HE_SINH_THAI_CEO1983.pptx
+++ b/document/SLIDE_TONG_THE_HE_SINH_THAI_CEO1983.pptx
@@ -1491,33 +1491,9 @@
           <a:chExt cx="0" cy="0"/>
         </a:xfrm>
       </p:grpSpPr>
-      <p:pic>
-        <p:nvPicPr>
-          <p:cNvPr id="2" name="Image 0" descr="D:\download\VICONNECT\CEO_VIONE_PROJECT\ceo1983_project\document\images\backgrounds\01_skyline_lake.jpg">    </p:cNvPr>
-          <p:cNvPicPr>
-            <a:picLocks noChangeAspect="1"/>
-          </p:cNvPicPr>
-          <p:nvPr/>
-        </p:nvPicPr>
-        <p:blipFill>
-          <a:blip r:embed="rId1"/>
-          <a:stretch>
-            <a:fillRect/>
-          </a:stretch>
-        </p:blipFill>
-        <p:spPr>
-          <a:xfrm>
-            <a:off x="0" y="0"/>
-            <a:ext cx="9144000" cy="5143500"/>
-          </a:xfrm>
-          <a:prstGeom prst="rect">
-            <a:avLst/>
-          </a:prstGeom>
-        </p:spPr>
-      </p:pic>
-      <p:sp>
-        <p:nvSpPr>
-          <p:cNvPr id="3" name="Shape 0"/>
+      <p:sp>
+        <p:nvSpPr>
+          <p:cNvPr id="2" name="Shape 0"/>
           <p:cNvSpPr/>
           <p:nvPr/>
         </p:nvSpPr>
@@ -1544,7 +1520,7 @@
       </p:sp>
       <p:sp>
         <p:nvSpPr>
-          <p:cNvPr id="4" name="Text 1"/>
+          <p:cNvPr id="3" name="Text 1"/>
           <p:cNvSpPr/>
           <p:nvPr/>
         </p:nvSpPr>
@@ -1583,7 +1559,7 @@
       </p:sp>
       <p:sp>
         <p:nvSpPr>
-          <p:cNvPr id="5" name="Text 2"/>
+          <p:cNvPr id="4" name="Text 2"/>
           <p:cNvSpPr/>
           <p:nvPr/>
         </p:nvSpPr>
@@ -1614,7 +1590,7 @@
                 <a:ea typeface="Arial" pitchFamily="34" charset="-122"/>
                 <a:cs typeface="Arial" pitchFamily="34" charset="-120"/>
               </a:rPr>
-              <a:t>BÁO CÁO TỔNG THỂ HỆ SINH THÁI SỐ KÉP</a:t>
+              <a:t>BÁO CÁO GIẢI PHÁP CHUYỂN ĐỔI SỐ TOÀN DIỆN</a:t>
             </a:r>
             <a:endParaRPr lang="en-US" sz="1100" dirty="0"/>
           </a:p>
@@ -1622,7 +1598,7 @@
       </p:sp>
       <p:sp>
         <p:nvSpPr>
-          <p:cNvPr id="6" name="Shape 3"/>
+          <p:cNvPr id="5" name="Shape 3"/>
           <p:cNvSpPr/>
           <p:nvPr/>
         </p:nvSpPr>
@@ -1651,7 +1627,7 @@
       </p:sp>
       <p:sp>
         <p:nvSpPr>
-          <p:cNvPr id="7" name="Text 4"/>
+          <p:cNvPr id="6" name="Text 4"/>
           <p:cNvSpPr/>
           <p:nvPr/>
         </p:nvSpPr>
@@ -1682,7 +1658,7 @@
                 <a:ea typeface="Arial" pitchFamily="34" charset="-122"/>
                 <a:cs typeface="Arial" pitchFamily="34" charset="-120"/>
               </a:rPr>
-              <a:t>HỆ THỐNG QUẢN LÝ CLB DOANH NHÂN CEO 1983</a:t>
+              <a:t>HỆ THỐNG ĐIỀU HÀNH &amp; KẾT NỐI DOANH NHÂN CEO 1983</a:t>
             </a:r>
             <a:endParaRPr lang="en-US" sz="2600" dirty="0"/>
           </a:p>
@@ -1690,7 +1666,7 @@
       </p:sp>
       <p:sp>
         <p:nvSpPr>
-          <p:cNvPr id="8" name="Text 5"/>
+          <p:cNvPr id="7" name="Text 5"/>
           <p:cNvSpPr/>
           <p:nvPr/>
         </p:nvSpPr>
@@ -1721,7 +1697,7 @@
                 <a:ea typeface="Arial" pitchFamily="34" charset="-122"/>
                 <a:cs typeface="Arial" pitchFamily="34" charset="-120"/>
               </a:rPr>
-              <a:t>HIỆN THỰC HÓA 3 BÀI TOÁN CHIẾN LƯỢC &amp; CÁC ĐỘT PHÁ CÔNG NGHỆ VƯỢT TRỘI</a:t>
+              <a:t>HIỆN THỰC HÓA 3 BÀI TOÁN CHIẾN LƯỢC VÌ SỰ PHÁT TRIỂN BỀN VỮNG CỦA HỘI VIÊN</a:t>
             </a:r>
             <a:endParaRPr lang="en-US" sz="1300" dirty="0"/>
           </a:p>
@@ -1729,7 +1705,7 @@
       </p:sp>
       <p:sp>
         <p:nvSpPr>
-          <p:cNvPr id="9" name="Text 6"/>
+          <p:cNvPr id="8" name="Text 6"/>
           <p:cNvSpPr/>
           <p:nvPr/>
         </p:nvSpPr>
@@ -1760,7 +1736,7 @@
                 <a:ea typeface="Arial" pitchFamily="34" charset="-122"/>
                 <a:cs typeface="Arial" pitchFamily="34" charset="-120"/>
               </a:rPr>
-              <a:t>Báo cáo toàn diện bức tranh 2 sản phẩm Web CRM &amp; Mobile App do ViConnect / Vione nghiên cứu, xây dựng và phát triển theo đặt hàng từ Ban Lãnh Đạo CLB CEO 1983.</a:t>
+              <a:t>Báo cáo toàn diện giải pháp chuyển đổi số gồm Hệ Thống Quản Trị Web CRM &amp; Ứng Dụng Di Động Doanh Nhân do Tập đoàn Công nghệ ViConnect nghiên cứu và phát triển theo đặt hàng từ Ban Lãnh Đạo CLB CEO 1983.</a:t>
             </a:r>
             <a:endParaRPr lang="en-US" sz="1200" dirty="0"/>
           </a:p>
@@ -1768,7 +1744,7 @@
       </p:sp>
       <p:sp>
         <p:nvSpPr>
-          <p:cNvPr id="10" name="Shape 7"/>
+          <p:cNvPr id="9" name="Shape 7"/>
           <p:cNvSpPr/>
           <p:nvPr/>
         </p:nvSpPr>
@@ -1795,7 +1771,7 @@
       </p:sp>
       <p:sp>
         <p:nvSpPr>
-          <p:cNvPr id="11" name="Text 8"/>
+          <p:cNvPr id="10" name="Text 8"/>
           <p:cNvSpPr/>
           <p:nvPr/>
         </p:nvSpPr>
@@ -1891,33 +1867,9 @@
           <a:chExt cx="0" cy="0"/>
         </a:xfrm>
       </p:grpSpPr>
-      <p:pic>
-        <p:nvPicPr>
-          <p:cNvPr id="2" name="Image 0" descr="D:\download\VICONNECT\CEO_VIONE_PROJECT\ceo1983_project\document\images\backgrounds\02_boardroom.jpg">    </p:cNvPr>
-          <p:cNvPicPr>
-            <a:picLocks noChangeAspect="1"/>
-          </p:cNvPicPr>
-          <p:nvPr/>
-        </p:nvPicPr>
-        <p:blipFill>
-          <a:blip r:embed="rId1"/>
-          <a:stretch>
-            <a:fillRect/>
-          </a:stretch>
-        </p:blipFill>
-        <p:spPr>
-          <a:xfrm>
-            <a:off x="0" y="0"/>
-            <a:ext cx="9144000" cy="5143500"/>
-          </a:xfrm>
-          <a:prstGeom prst="rect">
-            <a:avLst/>
-          </a:prstGeom>
-        </p:spPr>
-      </p:pic>
-      <p:sp>
-        <p:nvSpPr>
-          <p:cNvPr id="3" name="Shape 0"/>
+      <p:sp>
+        <p:nvSpPr>
+          <p:cNvPr id="2" name="Shape 0"/>
           <p:cNvSpPr/>
           <p:nvPr/>
         </p:nvSpPr>
@@ -1944,7 +1896,7 @@
       </p:sp>
       <p:sp>
         <p:nvSpPr>
-          <p:cNvPr id="4" name="Text 1"/>
+          <p:cNvPr id="3" name="Text 1"/>
           <p:cNvSpPr/>
           <p:nvPr/>
         </p:nvSpPr>
@@ -1983,7 +1935,7 @@
       </p:sp>
       <p:sp>
         <p:nvSpPr>
-          <p:cNvPr id="5" name="Text 2"/>
+          <p:cNvPr id="4" name="Text 2"/>
           <p:cNvSpPr/>
           <p:nvPr/>
         </p:nvSpPr>
@@ -2022,7 +1974,7 @@
       </p:sp>
       <p:sp>
         <p:nvSpPr>
-          <p:cNvPr id="6" name="Text 3"/>
+          <p:cNvPr id="5" name="Text 3"/>
           <p:cNvSpPr/>
           <p:nvPr/>
         </p:nvSpPr>
@@ -2053,7 +2005,7 @@
                 <a:ea typeface="Arial" pitchFamily="34" charset="-122"/>
                 <a:cs typeface="Arial" pitchFamily="34" charset="-120"/>
               </a:rPr>
-              <a:t>KIẾN TRÚC KÉP: WEB CRM QUẢN TRỊ &amp; MOBILE APP HỘI VIÊN</a:t>
+              <a:t>KIẾN TRÚC KÉP: WEB CRM ĐIỀU HÀNH &amp; MOBILE APP HỘI VIÊN</a:t>
             </a:r>
             <a:endParaRPr lang="en-US" sz="2000" dirty="0"/>
           </a:p>
@@ -2061,7 +2013,7 @@
       </p:sp>
       <p:sp>
         <p:nvSpPr>
-          <p:cNvPr id="7" name="Shape 4"/>
+          <p:cNvPr id="6" name="Shape 4"/>
           <p:cNvSpPr/>
           <p:nvPr/>
         </p:nvSpPr>
@@ -2088,7 +2040,7 @@
       </p:sp>
       <p:sp>
         <p:nvSpPr>
-          <p:cNvPr id="8" name="Text 5"/>
+          <p:cNvPr id="7" name="Text 5"/>
           <p:cNvSpPr/>
           <p:nvPr/>
         </p:nvSpPr>
@@ -2119,7 +2071,7 @@
                 <a:ea typeface="Arial" pitchFamily="34" charset="-122"/>
                 <a:cs typeface="Arial" pitchFamily="34" charset="-120"/>
               </a:rPr>
-              <a:t>1. CỔNG QUẢN TRỊ TRUNG ƯƠNG WEB CRM</a:t>
+              <a:t>1. CỔNG ĐIỀU HÀNH TRUNG TÂM WEB CRM</a:t>
             </a:r>
             <a:endParaRPr lang="en-US" sz="1400" dirty="0"/>
           </a:p>
@@ -2127,7 +2079,7 @@
       </p:sp>
       <p:sp>
         <p:nvSpPr>
-          <p:cNvPr id="9" name="Text 6"/>
+          <p:cNvPr id="8" name="Text 6"/>
           <p:cNvSpPr/>
           <p:nvPr/>
         </p:nvSpPr>
@@ -2166,7 +2118,7 @@
       </p:sp>
       <p:sp>
         <p:nvSpPr>
-          <p:cNvPr id="10" name="Text 7"/>
+          <p:cNvPr id="9" name="Text 7"/>
           <p:cNvSpPr/>
           <p:nvPr/>
         </p:nvSpPr>
@@ -2197,7 +2149,7 @@
                 <a:ea typeface="Arial" pitchFamily="34" charset="-122"/>
                 <a:cs typeface="Arial" pitchFamily="34" charset="-120"/>
               </a:rPr>
-              <a:t>✓  Trục xương sống quản lý dữ liệu 500+ doanh nghiệp hội viên 360°</a:t>
+              <a:t>✓  Quản lý tập trung toàn diện hơn 500 hồ sơ doanh nghiệp hội viên chính danh</a:t>
             </a:r>
             <a:endParaRPr lang="en-US" sz="1100" dirty="0"/>
           </a:p>
@@ -2220,7 +2172,7 @@
                 <a:ea typeface="Arial" pitchFamily="34" charset="-122"/>
                 <a:cs typeface="Arial" pitchFamily="34" charset="-120"/>
               </a:rPr>
-              <a:t>✓  Sơ đồ khán phòng rạp phim Cinema Seating Studio &amp; Soát vé Gatekeeper</a:t>
+              <a:t>✓  Sơ đồ xếp bàn tiệc Gala trang trọng, phân bổ chỗ ngồi khoa học, chính xác</a:t>
             </a:r>
             <a:endParaRPr lang="en-US" sz="1100" dirty="0"/>
           </a:p>
@@ -2243,7 +2195,7 @@
                 <a:ea typeface="Arial" pitchFamily="34" charset="-122"/>
                 <a:cs typeface="Arial" pitchFamily="34" charset="-120"/>
               </a:rPr>
-              <a:t>✓  Bàn giao việc Kanban phân ban, nhắc hạn deadline và đính kèm file Excel/Word</a:t>
+              <a:t>✓  Điều hành công việc, phân công nhiệm vụ và theo dõi tiến độ các ban</a:t>
             </a:r>
             <a:endParaRPr lang="en-US" sz="1100" dirty="0"/>
           </a:p>
@@ -2266,7 +2218,7 @@
                 <a:ea typeface="Arial" pitchFamily="34" charset="-122"/>
                 <a:cs typeface="Arial" pitchFamily="34" charset="-120"/>
               </a:rPr>
-              <a:t>✓  Kế toán tự động hóa VietQR Napas 247, gạch nợ tức thời 0.1s</a:t>
+              <a:t>✓  Quản lý thu chi, hội phí và ngân sách tự động hóa, minh bạch tài chính</a:t>
             </a:r>
             <a:endParaRPr lang="en-US" sz="1100" dirty="0"/>
           </a:p>
@@ -2289,7 +2241,7 @@
                 <a:ea typeface="Arial" pitchFamily="34" charset="-122"/>
                 <a:cs typeface="Arial" pitchFamily="34" charset="-120"/>
               </a:rPr>
-              <a:t>✓  Ma trận phân quyền Sticky Matrix 10 vai trò bảo mật cấp doanh nghiệp</a:t>
+              <a:t>✓  Phân quyền vận hành đúng chức năng thẩm quyền của từng ban chuyên môn</a:t>
             </a:r>
             <a:endParaRPr lang="en-US" sz="1100" dirty="0"/>
           </a:p>
@@ -2297,7 +2249,7 @@
       </p:sp>
       <p:sp>
         <p:nvSpPr>
-          <p:cNvPr id="11" name="Shape 8"/>
+          <p:cNvPr id="10" name="Shape 8"/>
           <p:cNvSpPr/>
           <p:nvPr/>
         </p:nvSpPr>
@@ -2324,7 +2276,7 @@
       </p:sp>
       <p:sp>
         <p:nvSpPr>
-          <p:cNvPr id="12" name="Text 9"/>
+          <p:cNvPr id="11" name="Text 9"/>
           <p:cNvSpPr/>
           <p:nvPr/>
         </p:nvSpPr>
@@ -2355,7 +2307,7 @@
                 <a:ea typeface="Arial" pitchFamily="34" charset="-122"/>
                 <a:cs typeface="Arial" pitchFamily="34" charset="-120"/>
               </a:rPr>
-              <a:t>2. VĂN PHÒNG BỎ TÚI MOBILE APP</a:t>
+              <a:t>2. VĂN PHÒNG DOANH NHÂN BỎ TÚI MOBILE APP</a:t>
             </a:r>
             <a:endParaRPr lang="en-US" sz="1400" dirty="0"/>
           </a:p>
@@ -2363,7 +2315,7 @@
       </p:sp>
       <p:sp>
         <p:nvSpPr>
-          <p:cNvPr id="13" name="Text 10"/>
+          <p:cNvPr id="12" name="Text 10"/>
           <p:cNvSpPr/>
           <p:nvPr/>
         </p:nvSpPr>
@@ -2394,7 +2346,7 @@
                 <a:ea typeface="Arial" pitchFamily="34" charset="-122"/>
                 <a:cs typeface="Arial" pitchFamily="34" charset="-120"/>
               </a:rPr>
-              <a:t>Dành cho: 500+ Doanh nhân hội viên chính danh CLB CEO 1983 (HanoiBA)</a:t>
+              <a:t>Dành cho: Hơn 500 Doanh nhân &amp; Lãnh đạo hội viên CLB CEO 1983</a:t>
             </a:r>
             <a:endParaRPr lang="en-US" sz="1000" dirty="0"/>
           </a:p>
@@ -2402,7 +2354,7 @@
       </p:sp>
       <p:sp>
         <p:nvSpPr>
-          <p:cNvPr id="14" name="Text 11"/>
+          <p:cNvPr id="13" name="Text 11"/>
           <p:cNvSpPr/>
           <p:nvPr/>
         </p:nvSpPr>
@@ -2433,7 +2385,7 @@
                 <a:ea typeface="Arial" pitchFamily="34" charset="-122"/>
                 <a:cs typeface="Arial" pitchFamily="34" charset="-120"/>
               </a:rPr>
-              <a:t>★  Thẻ VIP kỹ thuật số mạ vàng &amp; vCard QR lưu danh bạ 1 chạm vào điện thoại</a:t>
+              <a:t>★  Thẻ Hội Viên Điện Tử Thông Minh &amp; Danh thiếp số tiện lợi, lưu danh bạ 1 chạm</a:t>
             </a:r>
             <a:endParaRPr lang="en-US" sz="1100" dirty="0"/>
           </a:p>
@@ -2456,7 +2408,7 @@
                 <a:ea typeface="Arial" pitchFamily="34" charset="-122"/>
                 <a:cs typeface="Arial" pitchFamily="34" charset="-120"/>
               </a:rPr>
-              <a:t>★  Sàn giao thương B2B nội bộ: Trưng bày sản phẩm và cam kết chiết khấu độc quyền</a:t>
+              <a:t>★  Sàn giao thương B2B nội khối: Giới thiệu sản phẩm và ưu đãi đặc quyền giữa các hội viên</a:t>
             </a:r>
             <a:endParaRPr lang="en-US" sz="1100" dirty="0"/>
           </a:p>
@@ -2479,7 +2431,7 @@
                 <a:ea typeface="Arial" pitchFamily="34" charset="-122"/>
                 <a:cs typeface="Arial" pitchFamily="34" charset="-120"/>
               </a:rPr>
-              <a:t>★  Ví vé sự kiện E-Ticket, hiển thị sơ đồ số ghế VIP và mã quay thưởng #8388</a:t>
+              <a:t>★  Ví vé sự kiện Gala, xem trước số bàn tiệc, số ghế VIP và mã bốc thăm may mắn</a:t>
             </a:r>
             <a:endParaRPr lang="en-US" sz="1100" dirty="0"/>
           </a:p>
@@ -2502,7 +2454,7 @@
                 <a:ea typeface="Arial" pitchFamily="34" charset="-122"/>
                 <a:cs typeface="Arial" pitchFamily="34" charset="-120"/>
               </a:rPr>
-              <a:t>★  Mạng lưới doanh nhân chính danh, tìm kiếm đối tác &amp; Đặt lịch hẹn 1-on-1</a:t>
+              <a:t>★  Danh bạ kết nối hơn 500 CEO chính danh 11 ngành nghề, gửi lời mời hẹn gặp 1-on-1</a:t>
             </a:r>
             <a:endParaRPr lang="en-US" sz="1100" dirty="0"/>
           </a:p>
@@ -2525,7 +2477,7 @@
                 <a:ea typeface="Arial" pitchFamily="34" charset="-122"/>
                 <a:cs typeface="Arial" pitchFamily="34" charset="-120"/>
               </a:rPr>
-              <a:t>★  Trợ lý giọng nói Voice AI tiếng Việt &amp; Đàm thoại nội bộ VoIP Call mã hóa</a:t>
+              <a:t>★  Kênh trao đổi công việc và liên lạc trực tiếp, bảo mật riêng tư giữa các lãnh đạo</a:t>
             </a:r>
             <a:endParaRPr lang="en-US" sz="1100" dirty="0"/>
           </a:p>
@@ -2556,33 +2508,9 @@
           <a:chExt cx="0" cy="0"/>
         </a:xfrm>
       </p:grpSpPr>
-      <p:pic>
-        <p:nvPicPr>
-          <p:cNvPr id="2" name="Image 0" descr="D:\download\VICONNECT\CEO_VIONE_PROJECT\ceo1983_project\document\images\backgrounds\03_smartcity.jpg">    </p:cNvPr>
-          <p:cNvPicPr>
-            <a:picLocks noChangeAspect="1"/>
-          </p:cNvPicPr>
-          <p:nvPr/>
-        </p:nvPicPr>
-        <p:blipFill>
-          <a:blip r:embed="rId1"/>
-          <a:stretch>
-            <a:fillRect/>
-          </a:stretch>
-        </p:blipFill>
-        <p:spPr>
-          <a:xfrm>
-            <a:off x="0" y="0"/>
-            <a:ext cx="9144000" cy="5143500"/>
-          </a:xfrm>
-          <a:prstGeom prst="rect">
-            <a:avLst/>
-          </a:prstGeom>
-        </p:spPr>
-      </p:pic>
-      <p:sp>
-        <p:nvSpPr>
-          <p:cNvPr id="3" name="Shape 0"/>
+      <p:sp>
+        <p:nvSpPr>
+          <p:cNvPr id="2" name="Shape 0"/>
           <p:cNvSpPr/>
           <p:nvPr/>
         </p:nvSpPr>
@@ -2609,7 +2537,7 @@
       </p:sp>
       <p:sp>
         <p:nvSpPr>
-          <p:cNvPr id="4" name="Text 1"/>
+          <p:cNvPr id="3" name="Text 1"/>
           <p:cNvSpPr/>
           <p:nvPr/>
         </p:nvSpPr>
@@ -2648,7 +2576,7 @@
       </p:sp>
       <p:sp>
         <p:nvSpPr>
-          <p:cNvPr id="5" name="Text 2"/>
+          <p:cNvPr id="4" name="Text 2"/>
           <p:cNvSpPr/>
           <p:nvPr/>
         </p:nvSpPr>
@@ -2679,7 +2607,7 @@
                 <a:ea typeface="Arial" pitchFamily="34" charset="-122"/>
                 <a:cs typeface="Arial" pitchFamily="34" charset="-120"/>
               </a:rPr>
-              <a:t>HIỆN THỰC HÓA YÊU CẦU BAN ĐẦU</a:t>
+              <a:t>HIỆN THỰC HÓA 3 BÀI TOÁN CHIẾN LƯỢC</a:t>
             </a:r>
             <a:endParaRPr lang="en-US" sz="1100" dirty="0"/>
           </a:p>
@@ -2687,7 +2615,7 @@
       </p:sp>
       <p:sp>
         <p:nvSpPr>
-          <p:cNvPr id="6" name="Text 3"/>
+          <p:cNvPr id="5" name="Text 3"/>
           <p:cNvSpPr/>
           <p:nvPr/>
         </p:nvSpPr>
@@ -2718,7 +2646,7 @@
                 <a:ea typeface="Arial" pitchFamily="34" charset="-122"/>
                 <a:cs typeface="Arial" pitchFamily="34" charset="-120"/>
               </a:rPr>
-              <a:t>ĐÁP ỨNG TRỌN VẸN 3 BÀI TOÁN CHIẾN LƯỢC TỪ CEO 1983</a:t>
+              <a:t>GIẢI PHÁP SỐ HÓA TRIỆT ĐỂ CHO 3 TRĂN TRỞ CỦA BAN LÃNH ĐẠO</a:t>
             </a:r>
             <a:endParaRPr lang="en-US" sz="2000" dirty="0"/>
           </a:p>
@@ -2726,7 +2654,7 @@
       </p:sp>
       <p:sp>
         <p:nvSpPr>
-          <p:cNvPr id="7" name="Shape 4"/>
+          <p:cNvPr id="6" name="Shape 4"/>
           <p:cNvSpPr/>
           <p:nvPr/>
         </p:nvSpPr>
@@ -2753,7 +2681,7 @@
       </p:sp>
       <p:sp>
         <p:nvSpPr>
-          <p:cNvPr id="8" name="Text 5"/>
+          <p:cNvPr id="7" name="Text 5"/>
           <p:cNvSpPr/>
           <p:nvPr/>
         </p:nvSpPr>
@@ -2792,7 +2720,7 @@
       </p:sp>
       <p:sp>
         <p:nvSpPr>
-          <p:cNvPr id="9" name="Text 6"/>
+          <p:cNvPr id="8" name="Text 6"/>
           <p:cNvSpPr/>
           <p:nvPr/>
         </p:nvSpPr>
@@ -2840,7 +2768,7 @@
                 <a:ea typeface="Arial" pitchFamily="34" charset="-122"/>
                 <a:cs typeface="Arial" pitchFamily="34" charset="-120"/>
               </a:rPr>
-              <a:t>Trước đây: Lưu file Excel rời rạc, khó cập nhật pháp lý, thất lạc thông tin ban ngành.</a:t>
+              <a:t>Trước đây: Dữ liệu phân tán trong các file bảng tính rời rạc, khó tra cứu, thông tin doanh nghiệp không được cập nhật kịp thời.</a:t>
             </a:r>
             <a:endParaRPr lang="en-US" sz="1000" dirty="0"/>
           </a:p>
@@ -2848,7 +2776,7 @@
       </p:sp>
       <p:sp>
         <p:nvSpPr>
-          <p:cNvPr id="10" name="Text 7"/>
+          <p:cNvPr id="9" name="Text 7"/>
           <p:cNvSpPr/>
           <p:nvPr/>
         </p:nvSpPr>
@@ -2896,7 +2824,7 @@
                 <a:ea typeface="Arial" pitchFamily="34" charset="-122"/>
                 <a:cs typeface="Arial" pitchFamily="34" charset="-120"/>
               </a:rPr>
-              <a:t>ViConnect giải quyết: Số hóa hồ sơ 360°, quy trình xét duyệt 3 cấp bảo mật, gắn thẻ ngành nghề B2B, quản lý lịch sử tham gia và công nợ thường niên.</a:t>
+              <a:t>ViConnect giải quyết: Số hóa hồ sơ doanh nghiệp 360 độ gồm pháp lý, mã số thuế, năng lực cốt lõi, ngành nghề mũi nhọn và lịch sử tham gia.</a:t>
             </a:r>
             <a:endParaRPr lang="en-US" sz="1050" dirty="0"/>
           </a:p>
@@ -2904,7 +2832,7 @@
       </p:sp>
       <p:sp>
         <p:nvSpPr>
-          <p:cNvPr id="11" name="Shape 8"/>
+          <p:cNvPr id="10" name="Shape 8"/>
           <p:cNvSpPr/>
           <p:nvPr/>
         </p:nvSpPr>
@@ -2931,7 +2859,7 @@
       </p:sp>
       <p:sp>
         <p:nvSpPr>
-          <p:cNvPr id="12" name="Text 9"/>
+          <p:cNvPr id="11" name="Text 9"/>
           <p:cNvSpPr/>
           <p:nvPr/>
         </p:nvSpPr>
@@ -2962,7 +2890,7 @@
                 <a:ea typeface="Arial" pitchFamily="34" charset="-122"/>
                 <a:cs typeface="Arial" pitchFamily="34" charset="-120"/>
               </a:rPr>
-              <a:t>02. Check-in Sự Kiện &amp; Số Hóa Vé Gala</a:t>
+              <a:t>02. Tiếp Đón Khách Mời &amp; Xếp Chỗ Khoa Học</a:t>
             </a:r>
             <a:endParaRPr lang="en-US" sz="1300" dirty="0"/>
           </a:p>
@@ -2970,7 +2898,7 @@
       </p:sp>
       <p:sp>
         <p:nvSpPr>
-          <p:cNvPr id="13" name="Text 10"/>
+          <p:cNvPr id="12" name="Text 10"/>
           <p:cNvSpPr/>
           <p:nvPr/>
         </p:nvSpPr>
@@ -3018,7 +2946,7 @@
                 <a:ea typeface="Arial" pitchFamily="34" charset="-122"/>
                 <a:cs typeface="Arial" pitchFamily="34" charset="-120"/>
               </a:rPr>
-              <a:t>Trước đây: Nhầm lẫn bàn ghế, xếp chỗ thủ công mất thời gian, soát vé ùn tắc tại cửa.</a:t>
+              <a:t>Trước đây: Khách đến đông dễ nhầm bàn ghế, lễ tân tìm tên thủ công mất nhiều thời gian, dễ gây ùn tắc tại sảnh đón tiếp.</a:t>
             </a:r>
             <a:endParaRPr lang="en-US" sz="1000" dirty="0"/>
           </a:p>
@@ -3026,7 +2954,7 @@
       </p:sp>
       <p:sp>
         <p:nvSpPr>
-          <p:cNvPr id="14" name="Text 11"/>
+          <p:cNvPr id="13" name="Text 11"/>
           <p:cNvSpPr/>
           <p:nvPr/>
         </p:nvSpPr>
@@ -3074,7 +3002,7 @@
                 <a:ea typeface="Arial" pitchFamily="34" charset="-122"/>
                 <a:cs typeface="Arial" pitchFamily="34" charset="-120"/>
               </a:rPr>
-              <a:t>ViConnect giải quyết: Sơ đồ rạp phim Cinema Seating Map xếp chỗ chuẩn xác 100%, soát vé QR 0.1s không chạm, vòng quay bốc thăm may mắn Lucky Draw trực tiếp.</a:t>
+              <a:t>ViConnect giải quyết: Sơ đồ bàn tiệc bố trí chuẩn xác, đón tiếp khách mời bằng vé điện tử trên điện thoại chỉ 1 giây, bốc thăm may mắn công khai.</a:t>
             </a:r>
             <a:endParaRPr lang="en-US" sz="1050" dirty="0"/>
           </a:p>
@@ -3082,7 +3010,7 @@
       </p:sp>
       <p:sp>
         <p:nvSpPr>
-          <p:cNvPr id="15" name="Shape 12"/>
+          <p:cNvPr id="14" name="Shape 12"/>
           <p:cNvSpPr/>
           <p:nvPr/>
         </p:nvSpPr>
@@ -3109,7 +3037,7 @@
       </p:sp>
       <p:sp>
         <p:nvSpPr>
-          <p:cNvPr id="16" name="Text 13"/>
+          <p:cNvPr id="15" name="Text 13"/>
           <p:cNvSpPr/>
           <p:nvPr/>
         </p:nvSpPr>
@@ -3140,7 +3068,7 @@
                 <a:ea typeface="Arial" pitchFamily="34" charset="-122"/>
                 <a:cs typeface="Arial" pitchFamily="34" charset="-120"/>
               </a:rPr>
-              <a:t>03. Kết Nối Giao Thương &amp; Cơ Hội B2B</a:t>
+              <a:t>03. Thúc Đẩy Giao Thương &amp; Hợp Tác B2B</a:t>
             </a:r>
             <a:endParaRPr lang="en-US" sz="1300" dirty="0"/>
           </a:p>
@@ -3148,7 +3076,7 @@
       </p:sp>
       <p:sp>
         <p:nvSpPr>
-          <p:cNvPr id="17" name="Text 14"/>
+          <p:cNvPr id="16" name="Text 14"/>
           <p:cNvSpPr/>
           <p:nvPr/>
         </p:nvSpPr>
@@ -3196,7 +3124,7 @@
                 <a:ea typeface="Arial" pitchFamily="34" charset="-122"/>
                 <a:cs typeface="Arial" pitchFamily="34" charset="-120"/>
               </a:rPr>
-              <a:t>Trước đây: Giao lưu phong trào, thiếu công cụ theo dõi hợp tác kinh doanh và mua chéo dịch vụ.</a:t>
+              <a:t>Trước đây: Giao lưu phong trào chủ yếu qua các buổi gặp trực tiếp, thiếu công cụ theo dõi nhu cầu mua sắm và hợp tác thường xuyên.</a:t>
             </a:r>
             <a:endParaRPr lang="en-US" sz="1000" dirty="0"/>
           </a:p>
@@ -3204,7 +3132,7 @@
       </p:sp>
       <p:sp>
         <p:nvSpPr>
-          <p:cNvPr id="18" name="Text 15"/>
+          <p:cNvPr id="17" name="Text 15"/>
           <p:cNvSpPr/>
           <p:nvPr/>
         </p:nvSpPr>
@@ -3252,7 +3180,7 @@
                 <a:ea typeface="Arial" pitchFamily="34" charset="-122"/>
                 <a:cs typeface="Arial" pitchFamily="34" charset="-120"/>
               </a:rPr>
-              <a:t>ViConnect giải quyết: Sàn B2B nội bộ niêm yết sản phẩm chiết khấu cao, vCard QR 1 chạm không cần app, hệ thống đặt lịch hẹn cà phê 1-on-1 đồng bộ Calendar.</a:t>
+              <a:t>ViConnect giải quyết: Sàn B2B nội bộ niêm yết sản phẩm chiết khấu cao, danh thiếp số 1 chạm lưu danh bạ, hệ thống đặt hẹn cà phê 1-on-1 thuận tiện.</a:t>
             </a:r>
             <a:endParaRPr lang="en-US" sz="1050" dirty="0"/>
           </a:p>
@@ -3283,33 +3211,9 @@
           <a:chExt cx="0" cy="0"/>
         </a:xfrm>
       </p:grpSpPr>
-      <p:pic>
-        <p:nvPicPr>
-          <p:cNvPr id="2" name="Image 0" descr="D:\download\VICONNECT\CEO_VIONE_PROJECT\ceo1983_project\document\images\backgrounds\04_operations.jpg">    </p:cNvPr>
-          <p:cNvPicPr>
-            <a:picLocks noChangeAspect="1"/>
-          </p:cNvPicPr>
-          <p:nvPr/>
-        </p:nvPicPr>
-        <p:blipFill>
-          <a:blip r:embed="rId1"/>
-          <a:stretch>
-            <a:fillRect/>
-          </a:stretch>
-        </p:blipFill>
-        <p:spPr>
-          <a:xfrm>
-            <a:off x="0" y="0"/>
-            <a:ext cx="9144000" cy="5143500"/>
-          </a:xfrm>
-          <a:prstGeom prst="rect">
-            <a:avLst/>
-          </a:prstGeom>
-        </p:spPr>
-      </p:pic>
-      <p:sp>
-        <p:nvSpPr>
-          <p:cNvPr id="3" name="Shape 0"/>
+      <p:sp>
+        <p:nvSpPr>
+          <p:cNvPr id="2" name="Shape 0"/>
           <p:cNvSpPr/>
           <p:nvPr/>
         </p:nvSpPr>
@@ -3336,7 +3240,7 @@
       </p:sp>
       <p:sp>
         <p:nvSpPr>
-          <p:cNvPr id="4" name="Text 1"/>
+          <p:cNvPr id="3" name="Text 1"/>
           <p:cNvSpPr/>
           <p:nvPr/>
         </p:nvSpPr>
@@ -3375,7 +3279,7 @@
       </p:sp>
       <p:sp>
         <p:nvSpPr>
-          <p:cNvPr id="5" name="Text 2"/>
+          <p:cNvPr id="4" name="Text 2"/>
           <p:cNvSpPr/>
           <p:nvPr/>
         </p:nvSpPr>
@@ -3406,7 +3310,7 @@
                 <a:ea typeface="Arial" pitchFamily="34" charset="-122"/>
                 <a:cs typeface="Arial" pitchFamily="34" charset="-120"/>
               </a:rPr>
-              <a:t>PHÂN HỆ CÔNG CỤ QUẢN TRỊ</a:t>
+              <a:t>PHÂN HỆ TRUNG TÂM ĐIỀU HÀNH</a:t>
             </a:r>
             <a:endParaRPr lang="en-US" sz="1100" dirty="0"/>
           </a:p>
@@ -3414,7 +3318,7 @@
       </p:sp>
       <p:sp>
         <p:nvSpPr>
-          <p:cNvPr id="6" name="Text 3"/>
+          <p:cNvPr id="5" name="Text 3"/>
           <p:cNvSpPr/>
           <p:nvPr/>
         </p:nvSpPr>
@@ -3445,7 +3349,7 @@
                 <a:ea typeface="Arial" pitchFamily="34" charset="-122"/>
                 <a:cs typeface="Arial" pitchFamily="34" charset="-120"/>
               </a:rPr>
-              <a:t>PHÂN HỆ WEB CRM: CÁC CHỨC NĂNG CỐT LÕI ĐÃ HOÀN THIỆN</a:t>
+              <a:t>PHÂN HỆ WEB CRM: CÔNG CỤ VẬN HÀNH THỰC CHIẾN CỦA BAN LÃNH ĐẠO</a:t>
             </a:r>
             <a:endParaRPr lang="en-US" sz="2000" dirty="0"/>
           </a:p>
@@ -3453,7 +3357,7 @@
       </p:sp>
       <p:sp>
         <p:nvSpPr>
-          <p:cNvPr id="7" name="Shape 4"/>
+          <p:cNvPr id="6" name="Shape 4"/>
           <p:cNvSpPr/>
           <p:nvPr/>
         </p:nvSpPr>
@@ -3480,14 +3384,14 @@
       </p:sp>
       <p:pic>
         <p:nvPicPr>
-          <p:cNvPr id="8" name="Image 1" descr="D:\download\VICONNECT\CEO_VIONE_PROJECT\ceo1983_project\document\images\evidence\04_crm_members_management.png">    </p:cNvPr>
+          <p:cNvPr id="7" name="Image 0" descr="D:\download\VICONNECT\CEO_VIONE_PROJECT\ceo1983_project\document\images\guide_crm\08_quan_ly_hoi_vien.png">    </p:cNvPr>
           <p:cNvPicPr>
             <a:picLocks noChangeAspect="1"/>
           </p:cNvPicPr>
           <p:nvPr/>
         </p:nvPicPr>
         <p:blipFill>
-          <a:blip r:embed="rId2"/>
+          <a:blip r:embed="rId1"/>
           <a:stretch>
             <a:fillRect/>
           </a:stretch>
@@ -3504,7 +3408,7 @@
       </p:pic>
       <p:sp>
         <p:nvSpPr>
-          <p:cNvPr id="9" name="Text 5"/>
+          <p:cNvPr id="8" name="Text 5"/>
           <p:cNvSpPr/>
           <p:nvPr/>
         </p:nvSpPr>
@@ -3535,7 +3439,7 @@
                 <a:ea typeface="Arial" pitchFamily="34" charset="-122"/>
                 <a:cs typeface="Arial" pitchFamily="34" charset="-120"/>
               </a:rPr>
-              <a:t>1. Quản Trị Hội Viên 360° &amp; Thẩm Định</a:t>
+              <a:t>1. Quản Trị Danh Bạ Hội Viên 360°</a:t>
             </a:r>
             <a:endParaRPr lang="en-US" sz="1100" dirty="0"/>
           </a:p>
@@ -3543,7 +3447,7 @@
       </p:sp>
       <p:sp>
         <p:nvSpPr>
-          <p:cNvPr id="10" name="Text 6"/>
+          <p:cNvPr id="9" name="Text 6"/>
           <p:cNvSpPr/>
           <p:nvPr/>
         </p:nvSpPr>
@@ -3574,7 +3478,7 @@
                 <a:ea typeface="Arial" pitchFamily="34" charset="-122"/>
                 <a:cs typeface="Arial" pitchFamily="34" charset="-120"/>
               </a:rPr>
-              <a:t>Hồ sơ pháp lý, MST, phân ban chuyên môn, lịch sử hoạt động và trạng thái xét duyệt 3 cấp.</a:t>
+              <a:t>Hồ sơ pháp lý, mã số thuế, phân ban chuyên môn, thẩm định và phê duyệt hội viên mới minh bạch.</a:t>
             </a:r>
             <a:endParaRPr lang="en-US" sz="950" dirty="0"/>
           </a:p>
@@ -3582,7 +3486,7 @@
       </p:sp>
       <p:sp>
         <p:nvSpPr>
-          <p:cNvPr id="11" name="Shape 7"/>
+          <p:cNvPr id="10" name="Shape 7"/>
           <p:cNvSpPr/>
           <p:nvPr/>
         </p:nvSpPr>
@@ -3609,14 +3513,14 @@
       </p:sp>
       <p:pic>
         <p:nvPicPr>
-          <p:cNvPr id="12" name="Image 2" descr="D:\download\VICONNECT\CEO_VIONE_PROJECT\ceo1983_project\document\images\evidence\06_crm_cinema_seating_map.png">    </p:cNvPr>
+          <p:cNvPr id="11" name="Image 1" descr="D:\download\VICONNECT\CEO_VIONE_PROJECT\ceo1983_project\document\images\guide_crm\12_so_do_khan_phong_ban_tiec.png">    </p:cNvPr>
           <p:cNvPicPr>
             <a:picLocks noChangeAspect="1"/>
           </p:cNvPicPr>
           <p:nvPr/>
         </p:nvPicPr>
         <p:blipFill>
-          <a:blip r:embed="rId3"/>
+          <a:blip r:embed="rId2"/>
           <a:stretch>
             <a:fillRect/>
           </a:stretch>
@@ -3633,7 +3537,7 @@
       </p:pic>
       <p:sp>
         <p:nvSpPr>
-          <p:cNvPr id="13" name="Text 8"/>
+          <p:cNvPr id="12" name="Text 8"/>
           <p:cNvSpPr/>
           <p:nvPr/>
         </p:nvSpPr>
@@ -3664,7 +3568,7 @@
                 <a:ea typeface="Arial" pitchFamily="34" charset="-122"/>
                 <a:cs typeface="Arial" pitchFamily="34" charset="-120"/>
               </a:rPr>
-              <a:t>2. Cinema Seating Studio &amp; Soát Vé QR</a:t>
+              <a:t>2. Sơ Đồ Bàn Tiệc &amp; Đón Tiếp Sự Kiện</a:t>
             </a:r>
             <a:endParaRPr lang="en-US" sz="1100" dirty="0"/>
           </a:p>
@@ -3672,7 +3576,7 @@
       </p:sp>
       <p:sp>
         <p:nvSpPr>
-          <p:cNvPr id="14" name="Text 9"/>
+          <p:cNvPr id="13" name="Text 9"/>
           <p:cNvSpPr/>
           <p:nvPr/>
         </p:nvSpPr>
@@ -3703,7 +3607,7 @@
                 <a:ea typeface="Arial" pitchFamily="34" charset="-122"/>
                 <a:cs typeface="Arial" pitchFamily="34" charset="-120"/>
               </a:rPr>
-              <a:t>Sơ đồ khán phòng rạp phim trực quan, phân bổ bàn tròn VIP, soát vé Gatekeeper 0.1s không chạm.</a:t>
+              <a:t>Bố trí sơ đồ bàn tiệc VIP, xếp vị trí danh dự từng đại biểu, đón tiếp khách mời bằng mã vé điện tử nhanh chóng.</a:t>
             </a:r>
             <a:endParaRPr lang="en-US" sz="950" dirty="0"/>
           </a:p>
@@ -3711,7 +3615,7 @@
       </p:sp>
       <p:sp>
         <p:nvSpPr>
-          <p:cNvPr id="15" name="Shape 10"/>
+          <p:cNvPr id="14" name="Shape 10"/>
           <p:cNvSpPr/>
           <p:nvPr/>
         </p:nvSpPr>
@@ -3738,14 +3642,14 @@
       </p:sp>
       <p:pic>
         <p:nvPicPr>
-          <p:cNvPr id="16" name="Image 3" descr="D:\download\VICONNECT\CEO_VIONE_PROJECT\ceo1983_project\document\images\evidence\09_crm_tasks_kanban.png">    </p:cNvPr>
+          <p:cNvPr id="15" name="Image 2" descr="D:\download\VICONNECT\CEO_VIONE_PROJECT\ceo1983_project\document\images\guide_crm\17_giao_viec_nhiem_vu_kanban.png">    </p:cNvPr>
           <p:cNvPicPr>
             <a:picLocks noChangeAspect="1"/>
           </p:cNvPicPr>
           <p:nvPr/>
         </p:nvPicPr>
         <p:blipFill>
-          <a:blip r:embed="rId4"/>
+          <a:blip r:embed="rId3"/>
           <a:stretch>
             <a:fillRect/>
           </a:stretch>
@@ -3762,7 +3666,7 @@
       </p:pic>
       <p:sp>
         <p:nvSpPr>
-          <p:cNvPr id="17" name="Text 11"/>
+          <p:cNvPr id="16" name="Text 11"/>
           <p:cNvSpPr/>
           <p:nvPr/>
         </p:nvSpPr>
@@ -3793,7 +3697,7 @@
                 <a:ea typeface="Arial" pitchFamily="34" charset="-122"/>
                 <a:cs typeface="Arial" pitchFamily="34" charset="-120"/>
               </a:rPr>
-              <a:t>3. Bàn Giao Việc Kanban &amp; Xem File Đính Kèm</a:t>
+              <a:t>3. Phân Công Nhiệm Vụ &amp; Điều Hành Ban</a:t>
             </a:r>
             <a:endParaRPr lang="en-US" sz="1100" dirty="0"/>
           </a:p>
@@ -3801,7 +3705,7 @@
       </p:sp>
       <p:sp>
         <p:nvSpPr>
-          <p:cNvPr id="18" name="Text 12"/>
+          <p:cNvPr id="17" name="Text 12"/>
           <p:cNvSpPr/>
           <p:nvPr/>
         </p:nvSpPr>
@@ -3832,7 +3736,7 @@
                 <a:ea typeface="Arial" pitchFamily="34" charset="-122"/>
                 <a:cs typeface="Arial" pitchFamily="34" charset="-120"/>
               </a:rPr>
-              <a:t>Phân công nhiệm vụ rõ ràng người giao việc, subtask checklist, xem trực tiếp file Excel/Word/PDF.</a:t>
+              <a:t>Giao việc rõ người chịu trách nhiệm, theo dõi tiến độ và thời hạn hoàn thành, đính kèm tài liệu họp đầy đủ.</a:t>
             </a:r>
             <a:endParaRPr lang="en-US" sz="950" dirty="0"/>
           </a:p>
@@ -3840,7 +3744,7 @@
       </p:sp>
       <p:sp>
         <p:nvSpPr>
-          <p:cNvPr id="19" name="Shape 13"/>
+          <p:cNvPr id="18" name="Shape 13"/>
           <p:cNvSpPr/>
           <p:nvPr/>
         </p:nvSpPr>
@@ -3867,14 +3771,14 @@
       </p:sp>
       <p:pic>
         <p:nvPicPr>
-          <p:cNvPr id="20" name="Image 4" descr="D:\download\VICONNECT\CEO_VIONE_PROJECT\ceo1983_project\document\images\evidence\10_crm_cashbook_funds.png">    </p:cNvPr>
+          <p:cNvPr id="19" name="Image 3" descr="D:\download\VICONNECT\CEO_VIONE_PROJECT\ceo1983_project\document\images\guide_crm\19_quan_ly_so_quy_thu_chi.png">    </p:cNvPr>
           <p:cNvPicPr>
             <a:picLocks noChangeAspect="1"/>
           </p:cNvPicPr>
           <p:nvPr/>
         </p:nvPicPr>
         <p:blipFill>
-          <a:blip r:embed="rId5"/>
+          <a:blip r:embed="rId4"/>
           <a:stretch>
             <a:fillRect/>
           </a:stretch>
@@ -3891,7 +3795,7 @@
       </p:pic>
       <p:sp>
         <p:nvSpPr>
-          <p:cNvPr id="21" name="Text 14"/>
+          <p:cNvPr id="20" name="Text 14"/>
           <p:cNvSpPr/>
           <p:nvPr/>
         </p:nvSpPr>
@@ -3922,7 +3826,7 @@
                 <a:ea typeface="Arial" pitchFamily="34" charset="-122"/>
                 <a:cs typeface="Arial" pitchFamily="34" charset="-120"/>
               </a:rPr>
-              <a:t>4. Kế Toán Tài Chính &amp; Sổ Quỹ Thu Chi</a:t>
+              <a:t>4. Quản Lý Thu Chi &amp; Sổ Quỹ Tự Động</a:t>
             </a:r>
             <a:endParaRPr lang="en-US" sz="1100" dirty="0"/>
           </a:p>
@@ -3930,7 +3834,7 @@
       </p:sp>
       <p:sp>
         <p:nvSpPr>
-          <p:cNvPr id="22" name="Text 15"/>
+          <p:cNvPr id="21" name="Text 15"/>
           <p:cNvSpPr/>
           <p:nvPr/>
         </p:nvSpPr>
@@ -3961,7 +3865,7 @@
                 <a:ea typeface="Arial" pitchFamily="34" charset="-122"/>
                 <a:cs typeface="Arial" pitchFamily="34" charset="-120"/>
               </a:rPr>
-              <a:t>Quản lý thu chi minh bạch, xuất hóa đơn hội phí VietQR Napas 247, gạch nợ tức thời 100%.</a:t>
+              <a:t>Quản lý thu hội phí, tiền tài trợ và chi phí sự kiện; tự động đối soát ngân hàng và báo cáo tài chính minh bạch.</a:t>
             </a:r>
             <a:endParaRPr lang="en-US" sz="950" dirty="0"/>
           </a:p>
@@ -3992,33 +3896,9 @@
           <a:chExt cx="0" cy="0"/>
         </a:xfrm>
       </p:grpSpPr>
-      <p:pic>
-        <p:nvPicPr>
-          <p:cNvPr id="2" name="Image 0" descr="D:\download\VICONNECT\CEO_VIONE_PROJECT\ceo1983_project\document\images\backgrounds\05_mobile_network.jpg">    </p:cNvPr>
-          <p:cNvPicPr>
-            <a:picLocks noChangeAspect="1"/>
-          </p:cNvPicPr>
-          <p:nvPr/>
-        </p:nvPicPr>
-        <p:blipFill>
-          <a:blip r:embed="rId1"/>
-          <a:stretch>
-            <a:fillRect/>
-          </a:stretch>
-        </p:blipFill>
-        <p:spPr>
-          <a:xfrm>
-            <a:off x="0" y="0"/>
-            <a:ext cx="9144000" cy="5143500"/>
-          </a:xfrm>
-          <a:prstGeom prst="rect">
-            <a:avLst/>
-          </a:prstGeom>
-        </p:spPr>
-      </p:pic>
-      <p:sp>
-        <p:nvSpPr>
-          <p:cNvPr id="3" name="Shape 0"/>
+      <p:sp>
+        <p:nvSpPr>
+          <p:cNvPr id="2" name="Shape 0"/>
           <p:cNvSpPr/>
           <p:nvPr/>
         </p:nvSpPr>
@@ -4045,7 +3925,7 @@
       </p:sp>
       <p:sp>
         <p:nvSpPr>
-          <p:cNvPr id="4" name="Text 1"/>
+          <p:cNvPr id="3" name="Text 1"/>
           <p:cNvSpPr/>
           <p:nvPr/>
         </p:nvSpPr>
@@ -4084,7 +3964,7 @@
       </p:sp>
       <p:sp>
         <p:nvSpPr>
-          <p:cNvPr id="5" name="Text 2"/>
+          <p:cNvPr id="4" name="Text 2"/>
           <p:cNvSpPr/>
           <p:nvPr/>
         </p:nvSpPr>
@@ -4115,7 +3995,7 @@
                 <a:ea typeface="Arial" pitchFamily="34" charset="-122"/>
                 <a:cs typeface="Arial" pitchFamily="34" charset="-120"/>
               </a:rPr>
-              <a:t>PHÂN HỆ ỨNG DỤNG HỘI VIÊN</a:t>
+              <a:t>PHÂN HỆ ỨNG DỤNG DOANH NHÂN</a:t>
             </a:r>
             <a:endParaRPr lang="en-US" sz="1100" dirty="0"/>
           </a:p>
@@ -4123,7 +4003,7 @@
       </p:sp>
       <p:sp>
         <p:nvSpPr>
-          <p:cNvPr id="6" name="Text 3"/>
+          <p:cNvPr id="5" name="Text 3"/>
           <p:cNvSpPr/>
           <p:nvPr/>
         </p:nvSpPr>
@@ -4154,7 +4034,7 @@
                 <a:ea typeface="Arial" pitchFamily="34" charset="-122"/>
                 <a:cs typeface="Arial" pitchFamily="34" charset="-120"/>
               </a:rPr>
-              <a:t>PHÂN HỆ MOBILE APP: VĂN PHÒNG SỐ BỎ TÚI CỦA CEO</a:t>
+              <a:t>PHÂN HỆ MOBILE APP: VĂN PHÒNG DOANH NHÂN BỎ TÚI CỦA TỪNG CEO</a:t>
             </a:r>
             <a:endParaRPr lang="en-US" sz="2000" dirty="0"/>
           </a:p>
@@ -4162,7 +4042,7 @@
       </p:sp>
       <p:sp>
         <p:nvSpPr>
-          <p:cNvPr id="7" name="Shape 4"/>
+          <p:cNvPr id="6" name="Shape 4"/>
           <p:cNvSpPr/>
           <p:nvPr/>
         </p:nvSpPr>
@@ -4189,14 +4069,14 @@
       </p:sp>
       <p:pic>
         <p:nvPicPr>
-          <p:cNvPr id="8" name="Image 1" descr="D:\download\VICONNECT\CEO_VIONE_PROJECT\ceo1983_project\document\images\evidence\09_app_vip_card.png">    </p:cNvPr>
+          <p:cNvPr id="7" name="Image 0" descr="D:\download\VICONNECT\CEO_VIONE_PROJECT\ceo1983_project\document\images\guide_mobile\05_the_hoi_vien_vip_mat_truoc.png">    </p:cNvPr>
           <p:cNvPicPr>
             <a:picLocks noChangeAspect="1"/>
           </p:cNvPicPr>
           <p:nvPr/>
         </p:nvPicPr>
         <p:blipFill>
-          <a:blip r:embed="rId2"/>
+          <a:blip r:embed="rId1"/>
           <a:stretch>
             <a:fillRect/>
           </a:stretch>
@@ -4213,7 +4093,7 @@
       </p:pic>
       <p:sp>
         <p:nvSpPr>
-          <p:cNvPr id="9" name="Text 5"/>
+          <p:cNvPr id="8" name="Text 5"/>
           <p:cNvSpPr/>
           <p:nvPr/>
         </p:nvSpPr>
@@ -4244,7 +4124,7 @@
                 <a:ea typeface="Arial" pitchFamily="34" charset="-122"/>
                 <a:cs typeface="Arial" pitchFamily="34" charset="-120"/>
               </a:rPr>
-              <a:t>1. Thẻ Hội Viên VIP &amp; vCard QR 1 Chạm</a:t>
+              <a:t>1. Thẻ Hội Viên &amp; Danh Thiếp Số Tiện Lợi</a:t>
             </a:r>
             <a:endParaRPr lang="en-US" sz="1100" dirty="0"/>
           </a:p>
@@ -4252,7 +4132,7 @@
       </p:sp>
       <p:sp>
         <p:nvSpPr>
-          <p:cNvPr id="10" name="Text 6"/>
+          <p:cNvPr id="9" name="Text 6"/>
           <p:cNvSpPr/>
           <p:nvPr/>
         </p:nvSpPr>
@@ -4283,7 +4163,7 @@
                 <a:ea typeface="Arial" pitchFamily="34" charset="-122"/>
                 <a:cs typeface="Arial" pitchFamily="34" charset="-120"/>
               </a:rPr>
-              <a:t>Thẻ số mạ vàng nhận diện thương hiệu, quét QR lưu danh bạ điện thoại không cần cài app.</a:t>
+              <a:t>Thẻ số nhận diện sang trọng, tích hợp mã QR cá nhân giúp đối tác lưu danh bạ tức thì mà không cần cài app.</a:t>
             </a:r>
             <a:endParaRPr lang="en-US" sz="950" dirty="0"/>
           </a:p>
@@ -4291,7 +4171,7 @@
       </p:sp>
       <p:sp>
         <p:nvSpPr>
-          <p:cNvPr id="11" name="Shape 7"/>
+          <p:cNvPr id="10" name="Shape 7"/>
           <p:cNvSpPr/>
           <p:nvPr/>
         </p:nvSpPr>
@@ -4318,14 +4198,14 @@
       </p:sp>
       <p:pic>
         <p:nvPicPr>
-          <p:cNvPr id="12" name="Image 2" descr="D:\download\VICONNECT\CEO_VIONE_PROJECT\ceo1983_project\document\images\evidence\16_app_products_ecommerce_grid.png">    </p:cNvPr>
+          <p:cNvPr id="11" name="Image 1" descr="D:\download\VICONNECT\CEO_VIONE_PROJECT\ceo1983_project\document\images\guide_mobile\12_san_giao_thuong_b2b.png">    </p:cNvPr>
           <p:cNvPicPr>
             <a:picLocks noChangeAspect="1"/>
           </p:cNvPicPr>
           <p:nvPr/>
         </p:nvPicPr>
         <p:blipFill>
-          <a:blip r:embed="rId3"/>
+          <a:blip r:embed="rId2"/>
           <a:stretch>
             <a:fillRect/>
           </a:stretch>
@@ -4342,7 +4222,7 @@
       </p:pic>
       <p:sp>
         <p:nvSpPr>
-          <p:cNvPr id="13" name="Text 8"/>
+          <p:cNvPr id="12" name="Text 8"/>
           <p:cNvSpPr/>
           <p:nvPr/>
         </p:nvSpPr>
@@ -4373,7 +4253,7 @@
                 <a:ea typeface="Arial" pitchFamily="34" charset="-122"/>
                 <a:cs typeface="Arial" pitchFamily="34" charset="-120"/>
               </a:rPr>
-              <a:t>2. Sàn Thương Mại B2B &amp; Ưu Đãi Độc Quyền</a:t>
+              <a:t>2. Sàn Giao Thương B2B &amp; Ưu Đãi Nội Khối</a:t>
             </a:r>
             <a:endParaRPr lang="en-US" sz="1100" dirty="0"/>
           </a:p>
@@ -4381,7 +4261,7 @@
       </p:sp>
       <p:sp>
         <p:nvSpPr>
-          <p:cNvPr id="14" name="Text 9"/>
+          <p:cNvPr id="13" name="Text 9"/>
           <p:cNvSpPr/>
           <p:nvPr/>
         </p:nvSpPr>
@@ -4412,7 +4292,7 @@
                 <a:ea typeface="Arial" pitchFamily="34" charset="-122"/>
                 <a:cs typeface="Arial" pitchFamily="34" charset="-120"/>
               </a:rPr>
-              <a:t>Gian hàng trực tuyến cho từng doanh nghiệp, ưu tiên tiêu dùng chéo không qua trung gian.</a:t>
+              <a:t>Gian hàng giới thiệu giải pháp mũi nhọn của từng doanh nghiệp, cam kết chiết khấu ưu đãi cho cộng đồng CEO 1983.</a:t>
             </a:r>
             <a:endParaRPr lang="en-US" sz="950" dirty="0"/>
           </a:p>
@@ -4420,7 +4300,7 @@
       </p:sp>
       <p:sp>
         <p:nvSpPr>
-          <p:cNvPr id="15" name="Shape 10"/>
+          <p:cNvPr id="14" name="Shape 10"/>
           <p:cNvSpPr/>
           <p:nvPr/>
         </p:nvSpPr>
@@ -4447,14 +4327,14 @@
       </p:sp>
       <p:pic>
         <p:nvPicPr>
-          <p:cNvPr id="16" name="Image 3" descr="D:\download\VICONNECT\CEO_VIONE_PROJECT\ceo1983_project\document\images\evidence\14_app_event_checkin_pass.png">    </p:cNvPr>
+          <p:cNvPr id="15" name="Image 2" descr="D:\download\VICONNECT\CEO_VIONE_PROJECT\ceo1983_project\document\images\guide_mobile\11_ve_dien_tu_qr_checkin.png">    </p:cNvPr>
           <p:cNvPicPr>
             <a:picLocks noChangeAspect="1"/>
           </p:cNvPicPr>
           <p:nvPr/>
         </p:nvPicPr>
         <p:blipFill>
-          <a:blip r:embed="rId4"/>
+          <a:blip r:embed="rId3"/>
           <a:stretch>
             <a:fillRect/>
           </a:stretch>
@@ -4471,7 +4351,7 @@
       </p:pic>
       <p:sp>
         <p:nvSpPr>
-          <p:cNvPr id="17" name="Text 11"/>
+          <p:cNvPr id="16" name="Text 11"/>
           <p:cNvSpPr/>
           <p:nvPr/>
         </p:nvSpPr>
@@ -4502,7 +4382,7 @@
                 <a:ea typeface="Arial" pitchFamily="34" charset="-122"/>
                 <a:cs typeface="Arial" pitchFamily="34" charset="-120"/>
               </a:rPr>
-              <a:t>3. Ví Vé E-Ticket &amp; Vòng Quay May Mắn</a:t>
+              <a:t>3. Ví Vé Sự Kiện &amp; Bốc Thăm May Mắn</a:t>
             </a:r>
             <a:endParaRPr lang="en-US" sz="1100" dirty="0"/>
           </a:p>
@@ -4510,7 +4390,7 @@
       </p:sp>
       <p:sp>
         <p:nvSpPr>
-          <p:cNvPr id="18" name="Text 12"/>
+          <p:cNvPr id="17" name="Text 12"/>
           <p:cNvSpPr/>
           <p:nvPr/>
         </p:nvSpPr>
@@ -4541,7 +4421,7 @@
                 <a:ea typeface="Arial" pitchFamily="34" charset="-122"/>
                 <a:cs typeface="Arial" pitchFamily="34" charset="-120"/>
               </a:rPr>
-              <a:t>Lưu cuống vé sự kiện, hiển thị sơ đồ số ghế VIP và tự động kích hoạt mã bốc thăm #8388.</a:t>
+              <a:t>Lưu vé mời điện tử, thông báo trước số bàn tiệc và số ghế danh dự; tự động kích hoạt mã may mắn khi vào cửa.</a:t>
             </a:r>
             <a:endParaRPr lang="en-US" sz="950" dirty="0"/>
           </a:p>
@@ -4549,7 +4429,7 @@
       </p:sp>
       <p:sp>
         <p:nvSpPr>
-          <p:cNvPr id="19" name="Shape 13"/>
+          <p:cNvPr id="18" name="Shape 13"/>
           <p:cNvSpPr/>
           <p:nvPr/>
         </p:nvSpPr>
@@ -4576,14 +4456,14 @@
       </p:sp>
       <p:pic>
         <p:nvPicPr>
-          <p:cNvPr id="20" name="Image 4" descr="D:\download\VICONNECT\CEO_VIONE_PROJECT\ceo1983_project\document\images\evidence\15_app_members_directory.png">    </p:cNvPr>
+          <p:cNvPr id="19" name="Image 3" descr="D:\download\VICONNECT\CEO_VIONE_PROJECT\ceo1983_project\document\images\guide_mobile\07_danh_ba_hoi_vien.png">    </p:cNvPr>
           <p:cNvPicPr>
             <a:picLocks noChangeAspect="1"/>
           </p:cNvPicPr>
           <p:nvPr/>
         </p:nvPicPr>
         <p:blipFill>
-          <a:blip r:embed="rId5"/>
+          <a:blip r:embed="rId4"/>
           <a:stretch>
             <a:fillRect/>
           </a:stretch>
@@ -4600,7 +4480,7 @@
       </p:pic>
       <p:sp>
         <p:nvSpPr>
-          <p:cNvPr id="21" name="Text 14"/>
+          <p:cNvPr id="20" name="Text 14"/>
           <p:cNvSpPr/>
           <p:nvPr/>
         </p:nvSpPr>
@@ -4631,7 +4511,7 @@
                 <a:ea typeface="Arial" pitchFamily="34" charset="-122"/>
                 <a:cs typeface="Arial" pitchFamily="34" charset="-120"/>
               </a:rPr>
-              <a:t>4. Mạng Lưới 500+ CEO &amp; Đặt Hẹn 1-on-1</a:t>
+              <a:t>4. Danh Bạ Lãnh Đạo &amp; Hẹn Gặp 1-on-1</a:t>
             </a:r>
             <a:endParaRPr lang="en-US" sz="1100" dirty="0"/>
           </a:p>
@@ -4639,7 +4519,7 @@
       </p:sp>
       <p:sp>
         <p:nvSpPr>
-          <p:cNvPr id="22" name="Text 15"/>
+          <p:cNvPr id="21" name="Text 15"/>
           <p:cNvSpPr/>
           <p:nvPr/>
         </p:nvSpPr>
@@ -4670,7 +4550,7 @@
                 <a:ea typeface="Arial" pitchFamily="34" charset="-122"/>
                 <a:cs typeface="Arial" pitchFamily="34" charset="-120"/>
               </a:rPr>
-              <a:t>Tìm kiếm đối tác chính danh theo ngành nghề, gửi lời mời cà phê kết nối tự động cập nhật lịch.</a:t>
+              <a:t>Tìm kiếm đối tác chính danh theo 11 ngành nghề, gửi lời mời cà phê kết nối tự động cập nhật vào lịch làm việc.</a:t>
             </a:r>
             <a:endParaRPr lang="en-US" sz="950" dirty="0"/>
           </a:p>
@@ -4701,33 +4581,9 @@
           <a:chExt cx="0" cy="0"/>
         </a:xfrm>
       </p:grpSpPr>
-      <p:pic>
-        <p:nvPicPr>
-          <p:cNvPr id="2" name="Image 0" descr="D:\download\VICONNECT\CEO_VIONE_PROJECT\ceo1983_project\document\images\backgrounds\06_innovation.jpg">    </p:cNvPr>
-          <p:cNvPicPr>
-            <a:picLocks noChangeAspect="1"/>
-          </p:cNvPicPr>
-          <p:nvPr/>
-        </p:nvPicPr>
-        <p:blipFill>
-          <a:blip r:embed="rId1"/>
-          <a:stretch>
-            <a:fillRect/>
-          </a:stretch>
-        </p:blipFill>
-        <p:spPr>
-          <a:xfrm>
-            <a:off x="0" y="0"/>
-            <a:ext cx="9144000" cy="5143500"/>
-          </a:xfrm>
-          <a:prstGeom prst="rect">
-            <a:avLst/>
-          </a:prstGeom>
-        </p:spPr>
-      </p:pic>
-      <p:sp>
-        <p:nvSpPr>
-          <p:cNvPr id="3" name="Shape 0"/>
+      <p:sp>
+        <p:nvSpPr>
+          <p:cNvPr id="2" name="Shape 0"/>
           <p:cNvSpPr/>
           <p:nvPr/>
         </p:nvSpPr>
@@ -4754,7 +4610,7 @@
       </p:sp>
       <p:sp>
         <p:nvSpPr>
-          <p:cNvPr id="4" name="Text 1"/>
+          <p:cNvPr id="3" name="Text 1"/>
           <p:cNvSpPr/>
           <p:nvPr/>
         </p:nvSpPr>
@@ -4793,7 +4649,7 @@
       </p:sp>
       <p:sp>
         <p:nvSpPr>
-          <p:cNvPr id="5" name="Text 2"/>
+          <p:cNvPr id="4" name="Text 2"/>
           <p:cNvSpPr/>
           <p:nvPr/>
         </p:nvSpPr>
@@ -4824,7 +4680,7 @@
                 <a:ea typeface="Arial" pitchFamily="34" charset="-122"/>
                 <a:cs typeface="Arial" pitchFamily="34" charset="-120"/>
               </a:rPr>
-              <a:t>GIÁ TRỊ GIA TĂNG TỪ VICONNECT</a:t>
+              <a:t>GIÁ TRỊ GIA TĂNG THỰC TIỄN</a:t>
             </a:r>
             <a:endParaRPr lang="en-US" sz="1100" dirty="0"/>
           </a:p>
@@ -4832,7 +4688,7 @@
       </p:sp>
       <p:sp>
         <p:nvSpPr>
-          <p:cNvPr id="6" name="Text 3"/>
+          <p:cNvPr id="5" name="Text 3"/>
           <p:cNvSpPr/>
           <p:nvPr/>
         </p:nvSpPr>
@@ -4863,7 +4719,7 @@
                 <a:ea typeface="Arial" pitchFamily="34" charset="-122"/>
                 <a:cs typeface="Arial" pitchFamily="34" charset="-120"/>
               </a:rPr>
-              <a:t>5 ĐỘT PHÁ CÔNG NGHỆ NẰM NGOÀI YÊU CẦU BAN ĐẦU</a:t>
+              <a:t>5 ĐIỂM SÁNG NÂNG TẦM TRẢI NGHIỆM VẬN HÀNH &amp; HỘI VIÊN</a:t>
             </a:r>
             <a:endParaRPr lang="en-US" sz="2000" dirty="0"/>
           </a:p>
@@ -4871,7 +4727,7 @@
       </p:sp>
       <p:sp>
         <p:nvSpPr>
-          <p:cNvPr id="7" name="Shape 4"/>
+          <p:cNvPr id="6" name="Shape 4"/>
           <p:cNvSpPr/>
           <p:nvPr/>
         </p:nvSpPr>
@@ -4898,7 +4754,7 @@
       </p:sp>
       <p:sp>
         <p:nvSpPr>
-          <p:cNvPr id="8" name="Text 5"/>
+          <p:cNvPr id="7" name="Text 5"/>
           <p:cNvSpPr/>
           <p:nvPr/>
         </p:nvSpPr>
@@ -4929,7 +4785,7 @@
                 <a:ea typeface="Arial" pitchFamily="34" charset="-122"/>
                 <a:cs typeface="Arial" pitchFamily="34" charset="-120"/>
               </a:rPr>
-              <a:t>01. Kế Toán Tự Động VietQR Napas 247</a:t>
+              <a:t>01. Thu Chi &amp; Đóng Phí Tự Động Bằng Mã QR</a:t>
             </a:r>
             <a:endParaRPr lang="en-US" sz="1100" dirty="0"/>
           </a:p>
@@ -4937,7 +4793,7 @@
       </p:sp>
       <p:sp>
         <p:nvSpPr>
-          <p:cNvPr id="9" name="Text 6"/>
+          <p:cNvPr id="8" name="Text 6"/>
           <p:cNvSpPr/>
           <p:nvPr/>
         </p:nvSpPr>
@@ -4968,7 +4824,7 @@
                 <a:ea typeface="Arial" pitchFamily="34" charset="-122"/>
                 <a:cs typeface="Arial" pitchFamily="34" charset="-120"/>
               </a:rPr>
-              <a:t>Tự động sinh mã QR động chứa sẵn số tiền và mã hóa đơn. Gạch nợ tức thời 0.1s qua webhook ngân hàng; hạch toán chuẩn thông tư 200/TT-BTC.</a:t>
+              <a:t>Tự động tạo mã QR thanh toán đúng số tiền và nội dung, hệ thống ghi nhận đã thu tiền ngay khi giao dịch thành công, đối soát sổ quỹ chính xác 100%.</a:t>
             </a:r>
             <a:endParaRPr lang="en-US" sz="950" dirty="0"/>
           </a:p>
@@ -4976,7 +4832,7 @@
       </p:sp>
       <p:sp>
         <p:nvSpPr>
-          <p:cNvPr id="10" name="Shape 7"/>
+          <p:cNvPr id="9" name="Shape 7"/>
           <p:cNvSpPr/>
           <p:nvPr/>
         </p:nvSpPr>
@@ -5003,7 +4859,7 @@
       </p:sp>
       <p:sp>
         <p:nvSpPr>
-          <p:cNvPr id="11" name="Text 8"/>
+          <p:cNvPr id="10" name="Text 8"/>
           <p:cNvSpPr/>
           <p:nvPr/>
         </p:nvSpPr>
@@ -5034,7 +4890,7 @@
                 <a:ea typeface="Arial" pitchFamily="34" charset="-122"/>
                 <a:cs typeface="Arial" pitchFamily="34" charset="-120"/>
               </a:rPr>
-              <a:t>02. Trợ Lý Giọng Nói Voice AI Tiếng Việt</a:t>
+              <a:t>02. Sơ Đồ Xếp Bàn Tiệc &amp; Chỗ Ngồi Gala Chu Đáo</a:t>
             </a:r>
             <a:endParaRPr lang="en-US" sz="1100" dirty="0"/>
           </a:p>
@@ -5042,7 +4898,7 @@
       </p:sp>
       <p:sp>
         <p:nvSpPr>
-          <p:cNvPr id="12" name="Text 9"/>
+          <p:cNvPr id="11" name="Text 9"/>
           <p:cNvSpPr/>
           <p:nvPr/>
         </p:nvSpPr>
@@ -5073,7 +4929,7 @@
                 <a:ea typeface="Arial" pitchFamily="34" charset="-122"/>
                 <a:cs typeface="Arial" pitchFamily="34" charset="-120"/>
               </a:rPr>
-              <a:t>Tương tác rảnh tay tự nhiên: "Mở sự kiện sắp tới", "Xem hội phí của tôi", "Tìm đối tác xây dựng" — điều hướng màn hình ngay trong chớp mắt.</a:t>
+              <a:t>Ban tổ chức chủ động xếp chỗ trước theo bàn VIP và nhóm ngành nghề; khách đến sự kiện biết ngay vị trí ngồi của mình, tránh nhầm lẫn.</a:t>
             </a:r>
             <a:endParaRPr lang="en-US" sz="950" dirty="0"/>
           </a:p>
@@ -5081,7 +4937,7 @@
       </p:sp>
       <p:sp>
         <p:nvSpPr>
-          <p:cNvPr id="13" name="Shape 10"/>
+          <p:cNvPr id="12" name="Shape 10"/>
           <p:cNvSpPr/>
           <p:nvPr/>
         </p:nvSpPr>
@@ -5108,7 +4964,7 @@
       </p:sp>
       <p:sp>
         <p:nvSpPr>
-          <p:cNvPr id="14" name="Text 11"/>
+          <p:cNvPr id="13" name="Text 11"/>
           <p:cNvSpPr/>
           <p:nvPr/>
         </p:nvSpPr>
@@ -5139,7 +4995,7 @@
                 <a:ea typeface="Arial" pitchFamily="34" charset="-122"/>
                 <a:cs typeface="Arial" pitchFamily="34" charset="-120"/>
               </a:rPr>
-              <a:t>03. Đàm Thoại Nội Bộ Mã Hóa &amp; Native VoIP</a:t>
+              <a:t>03. Trợ Lý Số Hướng Dẫn Hội Viên 24/7</a:t>
             </a:r>
             <a:endParaRPr lang="en-US" sz="1100" dirty="0"/>
           </a:p>
@@ -5147,7 +5003,7 @@
       </p:sp>
       <p:sp>
         <p:nvSpPr>
-          <p:cNvPr id="15" name="Text 12"/>
+          <p:cNvPr id="14" name="Text 12"/>
           <p:cNvSpPr/>
           <p:nvPr/>
         </p:nvSpPr>
@@ -5178,7 +5034,7 @@
                 <a:ea typeface="Arial" pitchFamily="34" charset="-122"/>
                 <a:cs typeface="Arial" pitchFamily="34" charset="-120"/>
               </a:rPr>
-              <a:t>Cuộc gọi thoại &amp; video HD mã hóa riêng tư giữa các CEO. Đổ chuông ngay trên màn hình khóa điện thoại; gác máy 0ms không chuông ảo.</a:t>
+              <a:t>Hỗ trợ hội viên tra cứu nhanh thông tin sự kiện sắp diễn ra, thông tin hội đồng, liên hệ Ban Thư Ký và tìm kiếm các đối tác tiềm năng.</a:t>
             </a:r>
             <a:endParaRPr lang="en-US" sz="950" dirty="0"/>
           </a:p>
@@ -5186,7 +5042,7 @@
       </p:sp>
       <p:sp>
         <p:nvSpPr>
-          <p:cNvPr id="16" name="Shape 13"/>
+          <p:cNvPr id="15" name="Shape 13"/>
           <p:cNvSpPr/>
           <p:nvPr/>
         </p:nvSpPr>
@@ -5213,7 +5069,7 @@
       </p:sp>
       <p:sp>
         <p:nvSpPr>
-          <p:cNvPr id="17" name="Text 14"/>
+          <p:cNvPr id="16" name="Text 14"/>
           <p:cNvSpPr/>
           <p:nvPr/>
         </p:nvSpPr>
@@ -5244,7 +5100,7 @@
                 <a:ea typeface="Arial" pitchFamily="34" charset="-122"/>
                 <a:cs typeface="Arial" pitchFamily="34" charset="-120"/>
               </a:rPr>
-              <a:t>04. Cơ Chế Đồng Bộ Offline-First (Local Cache)</a:t>
+              <a:t>04. Kênh Trao Đổi &amp; Liên Lạc Nội Bộ Riêng Tư</a:t>
             </a:r>
             <a:endParaRPr lang="en-US" sz="1100" dirty="0"/>
           </a:p>
@@ -5252,7 +5108,7 @@
       </p:sp>
       <p:sp>
         <p:nvSpPr>
-          <p:cNvPr id="18" name="Text 15"/>
+          <p:cNvPr id="17" name="Text 15"/>
           <p:cNvSpPr/>
           <p:nvPr/>
         </p:nvSpPr>
@@ -5283,7 +5139,7 @@
                 <a:ea typeface="Arial" pitchFamily="34" charset="-122"/>
                 <a:cs typeface="Arial" pitchFamily="34" charset="-120"/>
               </a:rPr>
-              <a:t>Soát vé QR và check-in mượt mà ngay cả khi hội trường Gala mất sóng Internet; tự động đồng bộ hóa lên đám mây khi có kết nối trở lại.</a:t>
+              <a:t>Gọi điện thoại và trao đổi trực tiếp giữa các Chủ tịch &amp; CEO hội viên, bảo mật tuyệt đối, giữ gìn tính riêng tư trong các cuộc thảo luận kinh doanh.</a:t>
             </a:r>
             <a:endParaRPr lang="en-US" sz="950" dirty="0"/>
           </a:p>
@@ -5291,7 +5147,7 @@
       </p:sp>
       <p:sp>
         <p:nvSpPr>
-          <p:cNvPr id="19" name="Shape 16"/>
+          <p:cNvPr id="18" name="Shape 16"/>
           <p:cNvSpPr/>
           <p:nvPr/>
         </p:nvSpPr>
@@ -5318,7 +5174,7 @@
       </p:sp>
       <p:sp>
         <p:nvSpPr>
-          <p:cNvPr id="20" name="Text 17"/>
+          <p:cNvPr id="19" name="Text 17"/>
           <p:cNvSpPr/>
           <p:nvPr/>
         </p:nvSpPr>
@@ -5349,7 +5205,7 @@
                 <a:ea typeface="Arial" pitchFamily="34" charset="-122"/>
                 <a:cs typeface="Arial" pitchFamily="34" charset="-120"/>
               </a:rPr>
-              <a:t>05. Ma Trận Phân Quyền 6 Ban Chuyên Môn (RBAC)</a:t>
+              <a:t>05. Phân Quyền Vận Hành Theo Đúng 6 Ban Chuyên Môn</a:t>
             </a:r>
             <a:endParaRPr lang="en-US" sz="1100" dirty="0"/>
           </a:p>
@@ -5357,7 +5213,7 @@
       </p:sp>
       <p:sp>
         <p:nvSpPr>
-          <p:cNvPr id="21" name="Text 18"/>
+          <p:cNvPr id="20" name="Text 18"/>
           <p:cNvSpPr/>
           <p:nvPr/>
         </p:nvSpPr>
@@ -5388,7 +5244,7 @@
                 <a:ea typeface="Arial" pitchFamily="34" charset="-122"/>
                 <a:cs typeface="Arial" pitchFamily="34" charset="-120"/>
               </a:rPr>
-              <a:t>Phân tách quyền hạn độc lập cho 10 vai trò (Chủ tịch, Ban Thư Ký, Trưởng Ban, Kế toán, Hội viên); bảo vệ tuyệt đối bí mật kinh doanh.</a:t>
+              <a:t>Ban Lãnh Đạo nắm toàn cảnh hệ thống; các Trưởng Ban và Thành viên chỉ xem và xử lý đúng nghiệp vụ của ban mình, bảo vệ an toàn thông tin.</a:t>
             </a:r>
             <a:endParaRPr lang="en-US" sz="950" dirty="0"/>
           </a:p>
@@ -5419,33 +5275,9 @@
           <a:chExt cx="0" cy="0"/>
         </a:xfrm>
       </p:grpSpPr>
-      <p:pic>
-        <p:nvPicPr>
-          <p:cNvPr id="2" name="Image 0" descr="D:\download\VICONNECT\CEO_VIONE_PROJECT\ceo1983_project\document\images\backgrounds\07_banquet_gala.jpg">    </p:cNvPr>
-          <p:cNvPicPr>
-            <a:picLocks noChangeAspect="1"/>
-          </p:cNvPicPr>
-          <p:nvPr/>
-        </p:nvPicPr>
-        <p:blipFill>
-          <a:blip r:embed="rId1"/>
-          <a:stretch>
-            <a:fillRect/>
-          </a:stretch>
-        </p:blipFill>
-        <p:spPr>
-          <a:xfrm>
-            <a:off x="0" y="0"/>
-            <a:ext cx="9144000" cy="5143500"/>
-          </a:xfrm>
-          <a:prstGeom prst="rect">
-            <a:avLst/>
-          </a:prstGeom>
-        </p:spPr>
-      </p:pic>
-      <p:sp>
-        <p:nvSpPr>
-          <p:cNvPr id="3" name="Shape 0"/>
+      <p:sp>
+        <p:nvSpPr>
+          <p:cNvPr id="2" name="Shape 0"/>
           <p:cNvSpPr/>
           <p:nvPr/>
         </p:nvSpPr>
@@ -5472,7 +5304,7 @@
       </p:sp>
       <p:sp>
         <p:nvSpPr>
-          <p:cNvPr id="4" name="Text 1"/>
+          <p:cNvPr id="3" name="Text 1"/>
           <p:cNvSpPr/>
           <p:nvPr/>
         </p:nvSpPr>
@@ -5511,7 +5343,7 @@
       </p:sp>
       <p:sp>
         <p:nvSpPr>
-          <p:cNvPr id="5" name="Text 2"/>
+          <p:cNvPr id="4" name="Text 2"/>
           <p:cNvSpPr/>
           <p:nvPr/>
         </p:nvSpPr>
@@ -5550,7 +5382,7 @@
       </p:sp>
       <p:sp>
         <p:nvSpPr>
-          <p:cNvPr id="6" name="Text 3"/>
+          <p:cNvPr id="5" name="Text 3"/>
           <p:cNvSpPr/>
           <p:nvPr/>
         </p:nvSpPr>
@@ -5589,7 +5421,7 @@
       </p:sp>
       <p:sp>
         <p:nvSpPr>
-          <p:cNvPr id="7" name="Shape 4"/>
+          <p:cNvPr id="6" name="Shape 4"/>
           <p:cNvSpPr/>
           <p:nvPr/>
         </p:nvSpPr>
@@ -5616,7 +5448,7 @@
       </p:sp>
       <p:sp>
         <p:nvSpPr>
-          <p:cNvPr id="8" name="Text 5"/>
+          <p:cNvPr id="7" name="Text 5"/>
           <p:cNvSpPr/>
           <p:nvPr/>
         </p:nvSpPr>
@@ -5672,7 +5504,7 @@
       </p:sp>
       <p:sp>
         <p:nvSpPr>
-          <p:cNvPr id="9" name="Text 6"/>
+          <p:cNvPr id="8" name="Text 6"/>
           <p:cNvSpPr/>
           <p:nvPr/>
         </p:nvSpPr>
@@ -5711,7 +5543,7 @@
       </p:sp>
       <p:sp>
         <p:nvSpPr>
-          <p:cNvPr id="10" name="Text 7"/>
+          <p:cNvPr id="9" name="Text 7"/>
           <p:cNvSpPr/>
           <p:nvPr/>
         </p:nvSpPr>
@@ -5750,7 +5582,7 @@
       </p:sp>
       <p:sp>
         <p:nvSpPr>
-          <p:cNvPr id="11" name="Shape 8"/>
+          <p:cNvPr id="10" name="Shape 8"/>
           <p:cNvSpPr/>
           <p:nvPr/>
         </p:nvSpPr>
@@ -5777,7 +5609,7 @@
       </p:sp>
       <p:sp>
         <p:nvSpPr>
-          <p:cNvPr id="12" name="Text 9"/>
+          <p:cNvPr id="11" name="Text 9"/>
           <p:cNvSpPr/>
           <p:nvPr/>
         </p:nvSpPr>
@@ -5833,7 +5665,7 @@
       </p:sp>
       <p:sp>
         <p:nvSpPr>
-          <p:cNvPr id="13" name="Text 10"/>
+          <p:cNvPr id="12" name="Text 10"/>
           <p:cNvSpPr/>
           <p:nvPr/>
         </p:nvSpPr>
@@ -5872,7 +5704,7 @@
       </p:sp>
       <p:sp>
         <p:nvSpPr>
-          <p:cNvPr id="14" name="Text 11"/>
+          <p:cNvPr id="13" name="Text 11"/>
           <p:cNvSpPr/>
           <p:nvPr/>
         </p:nvSpPr>
@@ -5911,7 +5743,7 @@
       </p:sp>
       <p:sp>
         <p:nvSpPr>
-          <p:cNvPr id="15" name="Shape 12"/>
+          <p:cNvPr id="14" name="Shape 12"/>
           <p:cNvSpPr/>
           <p:nvPr/>
         </p:nvSpPr>
@@ -5938,7 +5770,7 @@
       </p:sp>
       <p:sp>
         <p:nvSpPr>
-          <p:cNvPr id="16" name="Text 13"/>
+          <p:cNvPr id="15" name="Text 13"/>
           <p:cNvSpPr/>
           <p:nvPr/>
         </p:nvSpPr>
@@ -5994,7 +5826,7 @@
       </p:sp>
       <p:sp>
         <p:nvSpPr>
-          <p:cNvPr id="17" name="Text 14"/>
+          <p:cNvPr id="16" name="Text 14"/>
           <p:cNvSpPr/>
           <p:nvPr/>
         </p:nvSpPr>
@@ -6033,7 +5865,7 @@
       </p:sp>
       <p:sp>
         <p:nvSpPr>
-          <p:cNvPr id="18" name="Text 15"/>
+          <p:cNvPr id="17" name="Text 15"/>
           <p:cNvSpPr/>
           <p:nvPr/>
         </p:nvSpPr>
@@ -6072,7 +5904,7 @@
       </p:sp>
       <p:sp>
         <p:nvSpPr>
-          <p:cNvPr id="19" name="Shape 16"/>
+          <p:cNvPr id="18" name="Shape 16"/>
           <p:cNvSpPr/>
           <p:nvPr/>
         </p:nvSpPr>
@@ -6099,7 +5931,7 @@
       </p:sp>
       <p:sp>
         <p:nvSpPr>
-          <p:cNvPr id="20" name="Text 17"/>
+          <p:cNvPr id="19" name="Text 17"/>
           <p:cNvSpPr/>
           <p:nvPr/>
         </p:nvSpPr>
@@ -6155,7 +5987,7 @@
       </p:sp>
       <p:sp>
         <p:nvSpPr>
-          <p:cNvPr id="21" name="Text 18"/>
+          <p:cNvPr id="20" name="Text 18"/>
           <p:cNvSpPr/>
           <p:nvPr/>
         </p:nvSpPr>
@@ -6194,7 +6026,7 @@
       </p:sp>
       <p:sp>
         <p:nvSpPr>
-          <p:cNvPr id="22" name="Text 19"/>
+          <p:cNvPr id="21" name="Text 19"/>
           <p:cNvSpPr/>
           <p:nvPr/>
         </p:nvSpPr>
